--- a/templates/posts/october/2026-10-31-sat-ig-reel-vampire-amoeba.pptx
+++ b/templates/posts/october/2026-10-31-sat-ig-reel-vampire-amoeba.pptx
@@ -3859,7 +3859,7 @@
     <p:bg>
       <p:bgPr>
         <a:solidFill>
-          <a:srgbClr val="22371F"/>
+          <a:srgbClr val="1E3F1D"/>
         </a:solidFill>
         <a:effectLst/>
       </p:bgPr>
@@ -3984,7 +3984,7 @@
             <a:r>
               <a:rPr sz="7200" b="1" i="0">
                 <a:solidFill>
-                  <a:srgbClr val="F4F1EA"/>
+                  <a:srgbClr val="F3F1EA"/>
                 </a:solidFill>
                 <a:latin typeface="Montserrat"/>
               </a:rPr>
@@ -4042,11 +4042,11 @@
               <a:rPr sz="6400" b="1" i="0">
                 <a:ln w="57150">
                   <a:solidFill>
-                    <a:srgbClr val="22371F"/>
+                    <a:srgbClr val="1E3F1D"/>
                   </a:solidFill>
                 </a:ln>
                 <a:solidFill>
-                  <a:srgbClr val="F4F1EA"/>
+                  <a:srgbClr val="F3F1EA"/>
                 </a:solidFill>
                 <a:latin typeface="Montserrat"/>
               </a:rPr>
@@ -4104,11 +4104,11 @@
               <a:rPr sz="5800" b="1" i="0">
                 <a:ln w="57150">
                   <a:solidFill>
-                    <a:srgbClr val="22371F"/>
+                    <a:srgbClr val="1E3F1D"/>
                   </a:solidFill>
                 </a:ln>
                 <a:solidFill>
-                  <a:srgbClr val="F4F1EA"/>
+                  <a:srgbClr val="F3F1EA"/>
                 </a:solidFill>
                 <a:latin typeface="Montserrat"/>
               </a:rPr>
@@ -4166,11 +4166,11 @@
               <a:rPr sz="6400" b="1" i="0">
                 <a:ln w="57150">
                   <a:solidFill>
-                    <a:srgbClr val="22371F"/>
+                    <a:srgbClr val="1E3F1D"/>
                   </a:solidFill>
                 </a:ln>
                 <a:solidFill>
-                  <a:srgbClr val="F4F1EA"/>
+                  <a:srgbClr val="F3F1EA"/>
                 </a:solidFill>
                 <a:latin typeface="Montserrat"/>
               </a:rPr>
@@ -4228,11 +4228,11 @@
               <a:rPr sz="6400" b="1" i="0">
                 <a:ln w="57150">
                   <a:solidFill>
-                    <a:srgbClr val="22371F"/>
+                    <a:srgbClr val="1E3F1D"/>
                   </a:solidFill>
                 </a:ln>
                 <a:solidFill>
-                  <a:srgbClr val="F4F1EA"/>
+                  <a:srgbClr val="F3F1EA"/>
                 </a:solidFill>
                 <a:latin typeface="Montserrat"/>
               </a:rPr>
@@ -4290,11 +4290,11 @@
               <a:rPr sz="6400" b="1" i="0">
                 <a:ln w="57150">
                   <a:solidFill>
-                    <a:srgbClr val="22371F"/>
+                    <a:srgbClr val="1E3F1D"/>
                   </a:solidFill>
                 </a:ln>
                 <a:solidFill>
-                  <a:srgbClr val="F4F1EA"/>
+                  <a:srgbClr val="F3F1EA"/>
                 </a:solidFill>
                 <a:latin typeface="Montserrat"/>
               </a:rPr>
